--- a/app/templates/colegio_de_profesores_del_peru/plantilla_curso_de_capacitacion.pptx
+++ b/app/templates/colegio_de_profesores_del_peru/plantilla_curso_de_capacitacion.pptx
@@ -113,6 +113,154 @@
 </p:presentation>
 </file>
 
+<file path=ppt/revisionInfo.xml><?xml version="1.0" encoding="utf-8"?>
+<p1510:revInfo xmlns:a="http://schemas.openxmlformats.org/drawingml/2006/main" xmlns:r="http://schemas.openxmlformats.org/officeDocument/2006/relationships" xmlns:p1510="http://schemas.microsoft.com/office/powerpoint/2015/10/main">
+  <p1510:revLst>
+    <p1510:client id="{DC95C979-BF43-4CCD-B6B8-3FF226F3145B}" v="3" dt="2026-03-05T19:06:47.478"/>
+  </p1510:revLst>
+</p1510:revInfo>
+</file>
+
+<file path=ppt/changesInfos/changesInfo1.xml><?xml version="1.0" encoding="utf-8"?>
+<pc:chgInfo xmlns:a="http://schemas.openxmlformats.org/drawingml/2006/main" xmlns:r="http://schemas.openxmlformats.org/officeDocument/2006/relationships" xmlns:ac="http://schemas.microsoft.com/office/drawing/2013/main/command" xmlns:pc="http://schemas.microsoft.com/office/powerpoint/2013/main/command">
+  <pc:docChgLst>
+    <pc:chgData name="Benjamín de Jesús Cueva Niño de Guzmán" userId="56da303013910523" providerId="LiveId" clId="{532B7A48-8887-4F62-9537-0BA1FAE83637}"/>
+    <pc:docChg chg="undo custSel modSld">
+      <pc:chgData name="Benjamín de Jesús Cueva Niño de Guzmán" userId="56da303013910523" providerId="LiveId" clId="{532B7A48-8887-4F62-9537-0BA1FAE83637}" dt="2026-03-05T19:06:47.478" v="115"/>
+      <pc:docMkLst>
+        <pc:docMk/>
+      </pc:docMkLst>
+      <pc:sldChg chg="delSp modSp mod">
+        <pc:chgData name="Benjamín de Jesús Cueva Niño de Guzmán" userId="56da303013910523" providerId="LiveId" clId="{532B7A48-8887-4F62-9537-0BA1FAE83637}" dt="2026-03-04T23:23:39.397" v="32" actId="1035"/>
+        <pc:sldMkLst>
+          <pc:docMk/>
+          <pc:sldMk cId="3047749852" sldId="264"/>
+        </pc:sldMkLst>
+        <pc:spChg chg="mod">
+          <ac:chgData name="Benjamín de Jesús Cueva Niño de Guzmán" userId="56da303013910523" providerId="LiveId" clId="{532B7A48-8887-4F62-9537-0BA1FAE83637}" dt="2026-03-04T23:23:39.397" v="32" actId="1035"/>
+          <ac:spMkLst>
+            <pc:docMk/>
+            <pc:sldMk cId="3047749852" sldId="264"/>
+            <ac:spMk id="15" creationId="{00000000-0000-0000-0000-000000000000}"/>
+          </ac:spMkLst>
+        </pc:spChg>
+        <pc:spChg chg="mod">
+          <ac:chgData name="Benjamín de Jesús Cueva Niño de Guzmán" userId="56da303013910523" providerId="LiveId" clId="{532B7A48-8887-4F62-9537-0BA1FAE83637}" dt="2026-03-04T23:23:30.266" v="30" actId="1035"/>
+          <ac:spMkLst>
+            <pc:docMk/>
+            <pc:sldMk cId="3047749852" sldId="264"/>
+            <ac:spMk id="16" creationId="{00000000-0000-0000-0000-000000000000}"/>
+          </ac:spMkLst>
+        </pc:spChg>
+        <pc:spChg chg="mod">
+          <ac:chgData name="Benjamín de Jesús Cueva Niño de Guzmán" userId="56da303013910523" providerId="LiveId" clId="{532B7A48-8887-4F62-9537-0BA1FAE83637}" dt="2026-03-04T23:23:30.266" v="30" actId="1035"/>
+          <ac:spMkLst>
+            <pc:docMk/>
+            <pc:sldMk cId="3047749852" sldId="264"/>
+            <ac:spMk id="17" creationId="{00000000-0000-0000-0000-000000000000}"/>
+          </ac:spMkLst>
+        </pc:spChg>
+        <pc:spChg chg="del">
+          <ac:chgData name="Benjamín de Jesús Cueva Niño de Guzmán" userId="56da303013910523" providerId="LiveId" clId="{532B7A48-8887-4F62-9537-0BA1FAE83637}" dt="2026-03-04T23:22:46.961" v="9" actId="478"/>
+          <ac:spMkLst>
+            <pc:docMk/>
+            <pc:sldMk cId="3047749852" sldId="264"/>
+            <ac:spMk id="18" creationId="{00000000-0000-0000-0000-000000000000}"/>
+          </ac:spMkLst>
+        </pc:spChg>
+      </pc:sldChg>
+      <pc:sldChg chg="addSp delSp modSp mod">
+        <pc:chgData name="Benjamín de Jesús Cueva Niño de Guzmán" userId="56da303013910523" providerId="LiveId" clId="{532B7A48-8887-4F62-9537-0BA1FAE83637}" dt="2026-03-05T19:06:47.478" v="115"/>
+        <pc:sldMkLst>
+          <pc:docMk/>
+          <pc:sldMk cId="1210459346" sldId="265"/>
+        </pc:sldMkLst>
+        <pc:spChg chg="mod">
+          <ac:chgData name="Benjamín de Jesús Cueva Niño de Guzmán" userId="56da303013910523" providerId="LiveId" clId="{532B7A48-8887-4F62-9537-0BA1FAE83637}" dt="2026-03-04T23:44:15.924" v="113" actId="1035"/>
+          <ac:spMkLst>
+            <pc:docMk/>
+            <pc:sldMk cId="1210459346" sldId="265"/>
+            <ac:spMk id="4" creationId="{385E0D12-7AAE-301C-8B48-6FE48D0B69EE}"/>
+          </ac:spMkLst>
+        </pc:spChg>
+        <pc:spChg chg="mod">
+          <ac:chgData name="Benjamín de Jesús Cueva Niño de Guzmán" userId="56da303013910523" providerId="LiveId" clId="{532B7A48-8887-4F62-9537-0BA1FAE83637}" dt="2026-03-02T15:15:47.805" v="0"/>
+          <ac:spMkLst>
+            <pc:docMk/>
+            <pc:sldMk cId="1210459346" sldId="265"/>
+            <ac:spMk id="5" creationId="{3C3B6426-6F38-8CFE-74FF-5A5CBF9F9D4A}"/>
+          </ac:spMkLst>
+        </pc:spChg>
+        <pc:spChg chg="mod">
+          <ac:chgData name="Benjamín de Jesús Cueva Niño de Guzmán" userId="56da303013910523" providerId="LiveId" clId="{532B7A48-8887-4F62-9537-0BA1FAE83637}" dt="2026-03-02T15:15:47.805" v="0"/>
+          <ac:spMkLst>
+            <pc:docMk/>
+            <pc:sldMk cId="1210459346" sldId="265"/>
+            <ac:spMk id="7" creationId="{6778C35F-9DB3-A0EE-C89E-38E7851C98AE}"/>
+          </ac:spMkLst>
+        </pc:spChg>
+        <pc:spChg chg="add del mod">
+          <ac:chgData name="Benjamín de Jesús Cueva Niño de Guzmán" userId="56da303013910523" providerId="LiveId" clId="{532B7A48-8887-4F62-9537-0BA1FAE83637}" dt="2026-03-05T19:06:47.065" v="114" actId="478"/>
+          <ac:spMkLst>
+            <pc:docMk/>
+            <pc:sldMk cId="1210459346" sldId="265"/>
+            <ac:spMk id="8" creationId="{CDB6F24C-029B-E910-994B-040089F67F31}"/>
+          </ac:spMkLst>
+        </pc:spChg>
+        <pc:spChg chg="add mod">
+          <ac:chgData name="Benjamín de Jesús Cueva Niño de Guzmán" userId="56da303013910523" providerId="LiveId" clId="{532B7A48-8887-4F62-9537-0BA1FAE83637}" dt="2026-03-05T19:06:47.478" v="115"/>
+          <ac:spMkLst>
+            <pc:docMk/>
+            <pc:sldMk cId="1210459346" sldId="265"/>
+            <ac:spMk id="9" creationId="{E25FC236-40C6-0C9A-A90B-552FD4CEED32}"/>
+          </ac:spMkLst>
+        </pc:spChg>
+        <pc:grpChg chg="add mod">
+          <ac:chgData name="Benjamín de Jesús Cueva Niño de Guzmán" userId="56da303013910523" providerId="LiveId" clId="{532B7A48-8887-4F62-9537-0BA1FAE83637}" dt="2026-03-02T15:15:47.805" v="0"/>
+          <ac:grpSpMkLst>
+            <pc:docMk/>
+            <pc:sldMk cId="1210459346" sldId="265"/>
+            <ac:grpSpMk id="2" creationId="{D94C737B-52E6-ECC0-A4DA-FE691B14FB62}"/>
+          </ac:grpSpMkLst>
+        </pc:grpChg>
+        <pc:graphicFrameChg chg="mod">
+          <ac:chgData name="Benjamín de Jesús Cueva Niño de Guzmán" userId="56da303013910523" providerId="LiveId" clId="{532B7A48-8887-4F62-9537-0BA1FAE83637}" dt="2026-03-04T23:27:50.789" v="78" actId="1035"/>
+          <ac:graphicFrameMkLst>
+            <pc:docMk/>
+            <pc:sldMk cId="1210459346" sldId="265"/>
+            <ac:graphicFrameMk id="20" creationId="{00000000-0000-0000-0000-000000000000}"/>
+          </ac:graphicFrameMkLst>
+        </pc:graphicFrameChg>
+        <pc:graphicFrameChg chg="mod">
+          <ac:chgData name="Benjamín de Jesús Cueva Niño de Guzmán" userId="56da303013910523" providerId="LiveId" clId="{532B7A48-8887-4F62-9537-0BA1FAE83637}" dt="2026-03-04T23:27:50.789" v="78" actId="1035"/>
+          <ac:graphicFrameMkLst>
+            <pc:docMk/>
+            <pc:sldMk cId="1210459346" sldId="265"/>
+            <ac:graphicFrameMk id="21" creationId="{00000000-0000-0000-0000-000000000000}"/>
+          </ac:graphicFrameMkLst>
+        </pc:graphicFrameChg>
+        <pc:graphicFrameChg chg="modGraphic">
+          <ac:chgData name="Benjamín de Jesús Cueva Niño de Guzmán" userId="56da303013910523" providerId="LiveId" clId="{532B7A48-8887-4F62-9537-0BA1FAE83637}" dt="2026-03-04T23:23:56.587" v="34" actId="255"/>
+          <ac:graphicFrameMkLst>
+            <pc:docMk/>
+            <pc:sldMk cId="1210459346" sldId="265"/>
+            <ac:graphicFrameMk id="29" creationId="{00000000-0000-0000-0000-000000000000}"/>
+          </ac:graphicFrameMkLst>
+        </pc:graphicFrameChg>
+        <pc:picChg chg="mod">
+          <ac:chgData name="Benjamín de Jesús Cueva Niño de Guzmán" userId="56da303013910523" providerId="LiveId" clId="{532B7A48-8887-4F62-9537-0BA1FAE83637}" dt="2026-03-04T23:27:50.789" v="78" actId="1035"/>
+          <ac:picMkLst>
+            <pc:docMk/>
+            <pc:sldMk cId="1210459346" sldId="265"/>
+            <ac:picMk id="3" creationId="{AB7EE0B6-B919-423B-6A1B-5DB7F9F6C8DB}"/>
+          </ac:picMkLst>
+        </pc:picChg>
+      </pc:sldChg>
+    </pc:docChg>
+  </pc:docChgLst>
+</pc:chgInfo>
+</file>
+
 <file path=ppt/slideLayouts/slideLayout1.xml><?xml version="1.0" encoding="utf-8"?>
 <p:sldLayout xmlns:a="http://schemas.openxmlformats.org/drawingml/2006/main" xmlns:r="http://schemas.openxmlformats.org/officeDocument/2006/relationships" xmlns:p="http://schemas.openxmlformats.org/presentationml/2006/main" type="title" preserve="1">
   <p:cSld name="Diapositiva de título">
@@ -244,7 +392,7 @@
           <a:p>
             <a:fld id="{6B5BCF65-E86E-467A-B19A-9BBB66F1E598}" type="datetimeFigureOut">
               <a:rPr lang="es-PE" smtClean="0"/>
-              <a:t>15/02/2026</a:t>
+              <a:t>5/03/2026</a:t>
             </a:fld>
             <a:endParaRPr lang="es-PE"/>
           </a:p>
@@ -414,7 +562,7 @@
           <a:p>
             <a:fld id="{6B5BCF65-E86E-467A-B19A-9BBB66F1E598}" type="datetimeFigureOut">
               <a:rPr lang="es-PE" smtClean="0"/>
-              <a:t>15/02/2026</a:t>
+              <a:t>5/03/2026</a:t>
             </a:fld>
             <a:endParaRPr lang="es-PE"/>
           </a:p>
@@ -594,7 +742,7 @@
           <a:p>
             <a:fld id="{6B5BCF65-E86E-467A-B19A-9BBB66F1E598}" type="datetimeFigureOut">
               <a:rPr lang="es-PE" smtClean="0"/>
-              <a:t>15/02/2026</a:t>
+              <a:t>5/03/2026</a:t>
             </a:fld>
             <a:endParaRPr lang="es-PE"/>
           </a:p>
@@ -764,7 +912,7 @@
           <a:p>
             <a:fld id="{6B5BCF65-E86E-467A-B19A-9BBB66F1E598}" type="datetimeFigureOut">
               <a:rPr lang="es-PE" smtClean="0"/>
-              <a:t>15/02/2026</a:t>
+              <a:t>5/03/2026</a:t>
             </a:fld>
             <a:endParaRPr lang="es-PE"/>
           </a:p>
@@ -1008,7 +1156,7 @@
           <a:p>
             <a:fld id="{6B5BCF65-E86E-467A-B19A-9BBB66F1E598}" type="datetimeFigureOut">
               <a:rPr lang="es-PE" smtClean="0"/>
-              <a:t>15/02/2026</a:t>
+              <a:t>5/03/2026</a:t>
             </a:fld>
             <a:endParaRPr lang="es-PE"/>
           </a:p>
@@ -1240,7 +1388,7 @@
           <a:p>
             <a:fld id="{6B5BCF65-E86E-467A-B19A-9BBB66F1E598}" type="datetimeFigureOut">
               <a:rPr lang="es-PE" smtClean="0"/>
-              <a:t>15/02/2026</a:t>
+              <a:t>5/03/2026</a:t>
             </a:fld>
             <a:endParaRPr lang="es-PE"/>
           </a:p>
@@ -1607,7 +1755,7 @@
           <a:p>
             <a:fld id="{6B5BCF65-E86E-467A-B19A-9BBB66F1E598}" type="datetimeFigureOut">
               <a:rPr lang="es-PE" smtClean="0"/>
-              <a:t>15/02/2026</a:t>
+              <a:t>5/03/2026</a:t>
             </a:fld>
             <a:endParaRPr lang="es-PE"/>
           </a:p>
@@ -1725,7 +1873,7 @@
           <a:p>
             <a:fld id="{6B5BCF65-E86E-467A-B19A-9BBB66F1E598}" type="datetimeFigureOut">
               <a:rPr lang="es-PE" smtClean="0"/>
-              <a:t>15/02/2026</a:t>
+              <a:t>5/03/2026</a:t>
             </a:fld>
             <a:endParaRPr lang="es-PE"/>
           </a:p>
@@ -1820,7 +1968,7 @@
           <a:p>
             <a:fld id="{6B5BCF65-E86E-467A-B19A-9BBB66F1E598}" type="datetimeFigureOut">
               <a:rPr lang="es-PE" smtClean="0"/>
-              <a:t>15/02/2026</a:t>
+              <a:t>5/03/2026</a:t>
             </a:fld>
             <a:endParaRPr lang="es-PE"/>
           </a:p>
@@ -2097,7 +2245,7 @@
           <a:p>
             <a:fld id="{6B5BCF65-E86E-467A-B19A-9BBB66F1E598}" type="datetimeFigureOut">
               <a:rPr lang="es-PE" smtClean="0"/>
-              <a:t>15/02/2026</a:t>
+              <a:t>5/03/2026</a:t>
             </a:fld>
             <a:endParaRPr lang="es-PE"/>
           </a:p>
@@ -2354,7 +2502,7 @@
           <a:p>
             <a:fld id="{6B5BCF65-E86E-467A-B19A-9BBB66F1E598}" type="datetimeFigureOut">
               <a:rPr lang="es-PE" smtClean="0"/>
-              <a:t>15/02/2026</a:t>
+              <a:t>5/03/2026</a:t>
             </a:fld>
             <a:endParaRPr lang="es-PE"/>
           </a:p>
@@ -2567,7 +2715,7 @@
           <a:p>
             <a:fld id="{6B5BCF65-E86E-467A-B19A-9BBB66F1E598}" type="datetimeFigureOut">
               <a:rPr lang="es-PE" smtClean="0"/>
-              <a:t>15/02/2026</a:t>
+              <a:t>5/03/2026</a:t>
             </a:fld>
             <a:endParaRPr lang="es-PE"/>
           </a:p>
@@ -3108,7 +3256,7 @@
         </p:nvSpPr>
         <p:spPr>
           <a:xfrm>
-            <a:off x="4252904" y="1340914"/>
+            <a:off x="4252904" y="1275597"/>
             <a:ext cx="1400192" cy="369332"/>
           </a:xfrm>
           <a:prstGeom prst="rect">
@@ -3139,7 +3287,7 @@
         </p:nvSpPr>
         <p:spPr>
           <a:xfrm>
-            <a:off x="2493035" y="1556955"/>
+            <a:off x="2493035" y="1500969"/>
             <a:ext cx="4919937" cy="523220"/>
           </a:xfrm>
           <a:prstGeom prst="rect">
@@ -3171,8 +3319,8 @@
         </p:nvSpPr>
         <p:spPr>
           <a:xfrm>
-            <a:off x="-90772" y="1962231"/>
-            <a:ext cx="10087570" cy="2185214"/>
+            <a:off x="380775" y="1915576"/>
+            <a:ext cx="9144451" cy="2800767"/>
           </a:xfrm>
           <a:prstGeom prst="rect">
             <a:avLst/>
@@ -3180,7 +3328,7 @@
           <a:noFill/>
         </p:spPr>
         <p:txBody>
-          <a:bodyPr wrap="none" rtlCol="0">
+          <a:bodyPr wrap="square" rtlCol="0" anchor="t" anchorCtr="1">
             <a:spAutoFit/>
           </a:bodyPr>
           <a:lstStyle/>
@@ -3236,29 +3384,10 @@
               <a:t>privilegios y consideraciones que le corresponden.</a:t>
             </a:r>
           </a:p>
-        </p:txBody>
-      </p:sp>
-      <p:sp>
-        <p:nvSpPr>
-          <p:cNvPr id="18" name="CuadroTexto 17"/>
-          <p:cNvSpPr txBox="1"/>
-          <p:nvPr/>
-        </p:nvSpPr>
-        <p:spPr>
-          <a:xfrm>
-            <a:off x="5752362" y="4270354"/>
-            <a:ext cx="3629904" cy="369332"/>
-          </a:xfrm>
-          <a:prstGeom prst="rect">
-            <a:avLst/>
-          </a:prstGeom>
-          <a:noFill/>
-        </p:spPr>
-        <p:txBody>
-          <a:bodyPr wrap="none" rtlCol="0">
-            <a:spAutoFit/>
-          </a:bodyPr>
-          <a:lstStyle/>
+          <a:p>
+            <a:pPr algn="ctr"/>
+            <a:endParaRPr lang="es-PE" sz="400" b="1" dirty="0"/>
+          </a:p>
           <a:p>
             <a:pPr algn="r"/>
             <a:r>
@@ -3860,13 +3989,13 @@
           <p:nvPr>
             <p:extLst>
               <p:ext uri="{D42A27DB-BD31-4B8C-83A1-F6EECF244321}">
-                <p14:modId xmlns:p14="http://schemas.microsoft.com/office/powerpoint/2010/main" val="3427282173"/>
+                <p14:modId xmlns:p14="http://schemas.microsoft.com/office/powerpoint/2010/main" val="2780697077"/>
               </p:ext>
             </p:extLst>
           </p:nvPr>
         </p:nvGraphicFramePr>
         <p:xfrm>
-          <a:off x="227269" y="2467252"/>
+          <a:off x="227269" y="2243308"/>
           <a:ext cx="2916000" cy="1820685"/>
         </p:xfrm>
         <a:graphic>
@@ -4142,13 +4271,13 @@
           <p:nvPr>
             <p:extLst>
               <p:ext uri="{D42A27DB-BD31-4B8C-83A1-F6EECF244321}">
-                <p14:modId xmlns:p14="http://schemas.microsoft.com/office/powerpoint/2010/main" val="4126049798"/>
+                <p14:modId xmlns:p14="http://schemas.microsoft.com/office/powerpoint/2010/main" val="3324935166"/>
               </p:ext>
             </p:extLst>
           </p:nvPr>
         </p:nvGraphicFramePr>
         <p:xfrm>
-          <a:off x="227269" y="4465779"/>
+          <a:off x="227269" y="4241835"/>
           <a:ext cx="2916000" cy="336094"/>
         </p:xfrm>
         <a:graphic>
@@ -4382,14 +4511,14 @@
           <p:nvPr>
             <p:extLst>
               <p:ext uri="{D42A27DB-BD31-4B8C-83A1-F6EECF244321}">
-                <p14:modId xmlns:p14="http://schemas.microsoft.com/office/powerpoint/2010/main" val="2070939982"/>
+                <p14:modId xmlns:p14="http://schemas.microsoft.com/office/powerpoint/2010/main" val="2134332314"/>
               </p:ext>
             </p:extLst>
           </p:nvPr>
         </p:nvGraphicFramePr>
         <p:xfrm>
           <a:off x="3203502" y="1974652"/>
-          <a:ext cx="6412523" cy="1492791"/>
+          <a:ext cx="6412523" cy="1495839"/>
         </p:xfrm>
         <a:graphic>
           <a:graphicData uri="http://schemas.openxmlformats.org/drawingml/2006/table">
@@ -4421,7 +4550,7 @@
                     <a:p>
                       <a:pPr marL="0" algn="ctr" defTabSz="914400" rtl="0" eaLnBrk="1" latinLnBrk="0" hangingPunct="1"/>
                       <a:r>
-                        <a:rPr lang="es-PE" sz="1100" b="0" kern="1200" dirty="0">
+                        <a:rPr lang="es-PE" sz="1120" b="0" kern="1200" dirty="0">
                           <a:solidFill>
                             <a:schemeClr val="dk1"/>
                           </a:solidFill>
@@ -4431,7 +4560,7 @@
                         </a:rPr>
                         <a:t>MÓDULO I</a:t>
                       </a:r>
-                      <a:endParaRPr lang="en-US" sz="1100" b="0" kern="1200" dirty="0">
+                      <a:endParaRPr lang="en-US" sz="1120" b="0" kern="1200" dirty="0">
                         <a:solidFill>
                           <a:schemeClr val="dk1"/>
                         </a:solidFill>
@@ -4450,7 +4579,7 @@
                     <a:p>
                       <a:pPr algn="ctr"/>
                       <a:r>
-                        <a:rPr lang="es-ES" sz="1100" b="0" i="0" kern="1200" dirty="0">
+                        <a:rPr lang="es-ES" sz="1000" b="0" i="0" kern="1200" dirty="0">
                           <a:solidFill>
                             <a:schemeClr val="dk1"/>
                           </a:solidFill>
@@ -4479,7 +4608,7 @@
                     <a:p>
                       <a:pPr marL="0" algn="ctr" defTabSz="914400" rtl="0" eaLnBrk="1" latinLnBrk="0" hangingPunct="1"/>
                       <a:r>
-                        <a:rPr lang="es-PE" sz="1100" kern="1200" dirty="0">
+                        <a:rPr lang="es-PE" sz="1120" kern="1200" dirty="0">
                           <a:solidFill>
                             <a:schemeClr val="dk1"/>
                           </a:solidFill>
@@ -4489,7 +4618,7 @@
                         </a:rPr>
                         <a:t>MÓDULO II</a:t>
                       </a:r>
-                      <a:endParaRPr lang="en-US" sz="1100" kern="1200" dirty="0">
+                      <a:endParaRPr lang="en-US" sz="1120" kern="1200" dirty="0">
                         <a:solidFill>
                           <a:schemeClr val="dk1"/>
                         </a:solidFill>
@@ -4508,7 +4637,7 @@
                     <a:p>
                       <a:pPr algn="ctr"/>
                       <a:r>
-                        <a:rPr lang="es-ES" sz="1100" b="0" i="0" kern="1200" dirty="0">
+                        <a:rPr lang="es-ES" sz="1000" b="0" i="0" kern="1200" dirty="0">
                           <a:solidFill>
                             <a:schemeClr val="dk1"/>
                           </a:solidFill>
@@ -4537,7 +4666,7 @@
                     <a:p>
                       <a:pPr marL="0" algn="ctr" defTabSz="914400" rtl="0" eaLnBrk="1" latinLnBrk="0" hangingPunct="1"/>
                       <a:r>
-                        <a:rPr lang="es-PE" sz="1100" kern="1200" dirty="0">
+                        <a:rPr lang="es-PE" sz="1120" kern="1200" dirty="0">
                           <a:solidFill>
                             <a:schemeClr val="dk1"/>
                           </a:solidFill>
@@ -4547,7 +4676,7 @@
                         </a:rPr>
                         <a:t>MÓDULO III</a:t>
                       </a:r>
-                      <a:endParaRPr lang="en-US" sz="1100" kern="1200" dirty="0">
+                      <a:endParaRPr lang="en-US" sz="1120" kern="1200" dirty="0">
                         <a:solidFill>
                           <a:schemeClr val="dk1"/>
                         </a:solidFill>
@@ -4566,7 +4695,7 @@
                     <a:p>
                       <a:pPr algn="ctr"/>
                       <a:r>
-                        <a:rPr lang="es-ES" sz="1100" b="0" i="0" kern="1200" dirty="0">
+                        <a:rPr lang="es-ES" sz="1000" b="0" i="0" kern="1200" dirty="0">
                           <a:solidFill>
                             <a:schemeClr val="dk1"/>
                           </a:solidFill>
@@ -4595,7 +4724,7 @@
                     <a:p>
                       <a:pPr marL="0" algn="ctr" defTabSz="914400" rtl="0" eaLnBrk="1" latinLnBrk="0" hangingPunct="1"/>
                       <a:r>
-                        <a:rPr lang="es-PE" sz="1100" kern="1200" dirty="0">
+                        <a:rPr lang="es-PE" sz="1120" kern="1200" dirty="0">
                           <a:solidFill>
                             <a:schemeClr val="dk1"/>
                           </a:solidFill>
@@ -4605,7 +4734,7 @@
                         </a:rPr>
                         <a:t>MÓDULO IV</a:t>
                       </a:r>
-                      <a:endParaRPr lang="en-US" sz="1100" kern="1200" dirty="0">
+                      <a:endParaRPr lang="en-US" sz="1120" kern="1200" dirty="0">
                         <a:solidFill>
                           <a:schemeClr val="dk1"/>
                         </a:solidFill>
@@ -4624,7 +4753,7 @@
                     <a:p>
                       <a:pPr algn="ctr"/>
                       <a:r>
-                        <a:rPr lang="es-ES" sz="1100" b="0" i="0" kern="1200" dirty="0">
+                        <a:rPr lang="es-ES" sz="1000" b="0" i="0" kern="1200" dirty="0">
                           <a:solidFill>
                             <a:schemeClr val="dk1"/>
                           </a:solidFill>
@@ -4653,7 +4782,7 @@
                     <a:p>
                       <a:pPr marL="0" algn="ctr" defTabSz="914400" rtl="0" eaLnBrk="1" latinLnBrk="0" hangingPunct="1"/>
                       <a:r>
-                        <a:rPr lang="es-PE" sz="1100" kern="1200" dirty="0">
+                        <a:rPr lang="es-PE" sz="1120" kern="1200" dirty="0">
                           <a:solidFill>
                             <a:schemeClr val="dk1"/>
                           </a:solidFill>
@@ -4663,7 +4792,7 @@
                         </a:rPr>
                         <a:t>MÓDULO V</a:t>
                       </a:r>
-                      <a:endParaRPr lang="en-US" sz="1100" kern="1200" dirty="0">
+                      <a:endParaRPr lang="en-US" sz="1120" kern="1200" dirty="0">
                         <a:solidFill>
                           <a:schemeClr val="dk1"/>
                         </a:solidFill>
@@ -4682,7 +4811,7 @@
                     <a:p>
                       <a:pPr algn="ctr"/>
                       <a:r>
-                        <a:rPr lang="es-ES" sz="1100" b="0" i="0" kern="1200" dirty="0">
+                        <a:rPr lang="es-ES" sz="1000" b="0" i="0" kern="1200" dirty="0">
                           <a:solidFill>
                             <a:schemeClr val="dk1"/>
                           </a:solidFill>
@@ -4728,7 +4857,7 @@
         </p:blipFill>
         <p:spPr>
           <a:xfrm>
-            <a:off x="1486822" y="3957005"/>
+            <a:off x="1486822" y="3733061"/>
             <a:ext cx="455266" cy="308814"/>
           </a:xfrm>
           <a:prstGeom prst="rect">
@@ -4750,7 +4879,7 @@
         </p:nvSpPr>
         <p:spPr>
           <a:xfrm>
-            <a:off x="1113988" y="5089855"/>
+            <a:off x="1255776" y="4659232"/>
             <a:ext cx="1397690" cy="369332"/>
           </a:xfrm>
           <a:prstGeom prst="rect">
@@ -4858,10 +4987,196 @@
             </a:lvl9pPr>
           </a:lstStyle>
           <a:p>
+            <a:pPr algn="ctr"/>
             <a:r>
               <a:rPr lang="es-PE" dirty="0"/>
               <a:t>{{QR_CODE}}</a:t>
             </a:r>
+          </a:p>
+        </p:txBody>
+      </p:sp>
+      <p:grpSp>
+        <p:nvGrpSpPr>
+          <p:cNvPr id="2" name="Grupo 1">
+            <a:extLst>
+              <a:ext uri="{FF2B5EF4-FFF2-40B4-BE49-F238E27FC236}">
+                <a16:creationId xmlns:a16="http://schemas.microsoft.com/office/drawing/2014/main" id="{D94C737B-52E6-ECC0-A4DA-FE691B14FB62}"/>
+              </a:ext>
+            </a:extLst>
+          </p:cNvPr>
+          <p:cNvGrpSpPr/>
+          <p:nvPr/>
+        </p:nvGrpSpPr>
+        <p:grpSpPr>
+          <a:xfrm>
+            <a:off x="611025" y="6108603"/>
+            <a:ext cx="2297657" cy="437033"/>
+            <a:chOff x="4281274" y="8807352"/>
+            <a:chExt cx="2297657" cy="437033"/>
+          </a:xfrm>
+        </p:grpSpPr>
+        <p:sp>
+          <p:nvSpPr>
+            <p:cNvPr id="5" name="Rectángulo 4">
+              <a:extLst>
+                <a:ext uri="{FF2B5EF4-FFF2-40B4-BE49-F238E27FC236}">
+                  <a16:creationId xmlns:a16="http://schemas.microsoft.com/office/drawing/2014/main" id="{3C3B6426-6F38-8CFE-74FF-5A5CBF9F9D4A}"/>
+                </a:ext>
+              </a:extLst>
+            </p:cNvPr>
+            <p:cNvSpPr/>
+            <p:nvPr/>
+          </p:nvSpPr>
+          <p:spPr>
+            <a:xfrm>
+              <a:off x="4312624" y="8807352"/>
+              <a:ext cx="2213928" cy="437033"/>
+            </a:xfrm>
+            <a:prstGeom prst="rect">
+              <a:avLst/>
+            </a:prstGeom>
+            <a:noFill/>
+          </p:spPr>
+          <p:style>
+            <a:lnRef idx="2">
+              <a:schemeClr val="accent1">
+                <a:shade val="15000"/>
+              </a:schemeClr>
+            </a:lnRef>
+            <a:fillRef idx="1">
+              <a:schemeClr val="accent1"/>
+            </a:fillRef>
+            <a:effectRef idx="0">
+              <a:schemeClr val="accent1"/>
+            </a:effectRef>
+            <a:fontRef idx="minor">
+              <a:schemeClr val="lt1"/>
+            </a:fontRef>
+          </p:style>
+          <p:txBody>
+            <a:bodyPr rtlCol="0" anchor="ctr"/>
+            <a:lstStyle/>
+            <a:p>
+              <a:pPr algn="ctr"/>
+              <a:endParaRPr lang="es-PE"/>
+            </a:p>
+          </p:txBody>
+        </p:sp>
+        <p:sp>
+          <p:nvSpPr>
+            <p:cNvPr id="7" name="CuadroTexto 6">
+              <a:extLst>
+                <a:ext uri="{FF2B5EF4-FFF2-40B4-BE49-F238E27FC236}">
+                  <a16:creationId xmlns:a16="http://schemas.microsoft.com/office/drawing/2014/main" id="{6778C35F-9DB3-A0EE-C89E-38E7851C98AE}"/>
+                </a:ext>
+              </a:extLst>
+            </p:cNvPr>
+            <p:cNvSpPr txBox="1"/>
+            <p:nvPr/>
+          </p:nvSpPr>
+          <p:spPr>
+            <a:xfrm>
+              <a:off x="4281274" y="8809560"/>
+              <a:ext cx="2297657" cy="392415"/>
+            </a:xfrm>
+            <a:prstGeom prst="rect">
+              <a:avLst/>
+            </a:prstGeom>
+            <a:noFill/>
+          </p:spPr>
+          <p:txBody>
+            <a:bodyPr wrap="square" rtlCol="0">
+              <a:spAutoFit/>
+            </a:bodyPr>
+            <a:lstStyle/>
+            <a:p>
+              <a:r>
+                <a:rPr lang="es-PE" sz="650" b="1" dirty="0"/>
+                <a:t>PARA POSTERIOR VERIFICACIÓN DE ESTE CERTIFICADO SE PUEDE REALIZAR INGRESANDO EL CÓDIGO DEL ESTUDIANTE EN: </a:t>
+              </a:r>
+              <a:r>
+                <a:rPr lang="es-PE" sz="650" b="1" dirty="0">
+                  <a:hlinkClick r:id="rId6"/>
+                </a:rPr>
+                <a:t>https://especializacionvirtual.com/validar-certificado/</a:t>
+              </a:r>
+              <a:r>
+                <a:rPr lang="es-PE" sz="650" b="1" dirty="0"/>
+                <a:t> </a:t>
+              </a:r>
+            </a:p>
+          </p:txBody>
+        </p:sp>
+      </p:grpSp>
+      <p:sp>
+        <p:nvSpPr>
+          <p:cNvPr id="9" name="Rectángulo 8">
+            <a:extLst>
+              <a:ext uri="{FF2B5EF4-FFF2-40B4-BE49-F238E27FC236}">
+                <a16:creationId xmlns:a16="http://schemas.microsoft.com/office/drawing/2014/main" id="{E25FC236-40C6-0C9A-A90B-552FD4CEED32}"/>
+              </a:ext>
+            </a:extLst>
+          </p:cNvPr>
+          <p:cNvSpPr/>
+          <p:nvPr/>
+        </p:nvSpPr>
+        <p:spPr>
+          <a:xfrm>
+            <a:off x="684240" y="5727842"/>
+            <a:ext cx="2130198" cy="366767"/>
+          </a:xfrm>
+          <a:prstGeom prst="rect">
+            <a:avLst/>
+          </a:prstGeom>
+        </p:spPr>
+        <p:txBody>
+          <a:bodyPr wrap="square">
+            <a:spAutoFit/>
+          </a:bodyPr>
+          <a:lstStyle/>
+          <a:p>
+            <a:pPr lvl="0" algn="ctr">
+              <a:spcBef>
+                <a:spcPts val="59"/>
+              </a:spcBef>
+            </a:pPr>
+            <a:r>
+              <a:rPr lang="es-PE" sz="900" dirty="0">
+                <a:solidFill>
+                  <a:prstClr val="black"/>
+                </a:solidFill>
+                <a:latin typeface="Times New Roman" panose="02020603050405020304" pitchFamily="18" charset="0"/>
+                <a:ea typeface="Cambria Math" panose="02040503050406030204" pitchFamily="18" charset="0"/>
+                <a:cs typeface="Times New Roman" panose="02020603050405020304" pitchFamily="18" charset="0"/>
+              </a:rPr>
+              <a:t>CÓDIGO ESTUDIANTE:</a:t>
+            </a:r>
+          </a:p>
+          <a:p>
+            <a:pPr algn="ctr">
+              <a:spcBef>
+                <a:spcPts val="59"/>
+              </a:spcBef>
+            </a:pPr>
+            <a:r>
+              <a:rPr lang="en-US" sz="800" b="1">
+                <a:solidFill>
+                  <a:prstClr val="black"/>
+                </a:solidFill>
+                <a:latin typeface="Times New Roman" panose="02020603050405020304" pitchFamily="18" charset="0"/>
+                <a:ea typeface="Cambria Math" panose="02040503050406030204" pitchFamily="18" charset="0"/>
+                <a:cs typeface="Times New Roman" panose="02020603050405020304" pitchFamily="18" charset="0"/>
+              </a:rPr>
+              <a:t>{{CODE_STUDENT}}</a:t>
+            </a:r>
+            <a:endParaRPr lang="en-US" sz="800" b="1" dirty="0">
+              <a:solidFill>
+                <a:prstClr val="black"/>
+              </a:solidFill>
+              <a:latin typeface="Times New Roman" panose="02020603050405020304" pitchFamily="18" charset="0"/>
+              <a:ea typeface="Cambria Math" panose="02040503050406030204" pitchFamily="18" charset="0"/>
+              <a:cs typeface="Times New Roman" panose="02020603050405020304" pitchFamily="18" charset="0"/>
+            </a:endParaRPr>
           </a:p>
         </p:txBody>
       </p:sp>
